--- a/docs/WHERE_本編スライド14枚_改訂版.pptx
+++ b/docs/WHERE_本編スライド14枚_改訂版.pptx
@@ -2431,7 +2431,7 @@
                 <a:ea typeface="Yu Gothic" pitchFamily="34" charset="-122"/>
                 <a:cs typeface="Yu Gothic" pitchFamily="34" charset="-120"/>
               </a:rPr>
-              <a:t>新築1件で、WHEREに75万〜125万円の成果収益</a:t>
+              <a:t>1件あたり15万〜125万円。工事規模に応じて収益が積み上がる</a:t>
             </a:r>
             <a:endParaRPr lang="en-US" sz="2600" dirty="0"/>
           </a:p>
@@ -2523,12 +2523,995 @@
         </p:nvSpPr>
         <p:spPr>
           <a:xfrm>
-            <a:off x="566928" y="1517904"/>
-            <a:ext cx="3200400" cy="1371600"/>
+            <a:off x="566928" y="1463040"/>
+            <a:ext cx="3931920" cy="384048"/>
           </a:xfrm>
           <a:prstGeom prst="roundRect">
             <a:avLst>
-              <a:gd name="adj" fmla="val 5333"/>
+              <a:gd name="adj" fmla="val 19048"/>
+            </a:avLst>
+          </a:prstGeom>
+          <a:solidFill>
+            <a:srgbClr val="13224A"/>
+          </a:solidFill>
+          <a:ln/>
+        </p:spPr>
+      </p:sp>
+      <p:sp>
+        <p:nvSpPr>
+          <p:cNvPr id="7" name="Text 5"/>
+          <p:cNvSpPr/>
+          <p:nvPr/>
+        </p:nvSpPr>
+        <p:spPr>
+          <a:xfrm>
+            <a:off x="786384" y="1463040"/>
+            <a:ext cx="3493008" cy="384048"/>
+          </a:xfrm>
+          <a:prstGeom prst="rect">
+            <a:avLst/>
+          </a:prstGeom>
+          <a:noFill/>
+          <a:ln/>
+        </p:spPr>
+        <p:txBody>
+          <a:bodyPr wrap="square" lIns="0" tIns="0" rIns="0" bIns="0" rtlCol="0" anchor="ctr"/>
+          <a:lstStyle/>
+          <a:p>
+            <a:pPr indent="0" marL="0">
+              <a:buNone/>
+            </a:pPr>
+            <a:r>
+              <a:rPr lang="en-US" sz="1150" b="1" dirty="0">
+                <a:solidFill>
+                  <a:srgbClr val="FFFFFF"/>
+                </a:solidFill>
+                <a:latin typeface="Yu Gothic" pitchFamily="34" charset="0"/>
+                <a:ea typeface="Yu Gothic" pitchFamily="34" charset="-122"/>
+                <a:cs typeface="Yu Gothic" pitchFamily="34" charset="-120"/>
+              </a:rPr>
+              <a:t>工事区分（1件あたり・仮定）</a:t>
+            </a:r>
+            <a:endParaRPr lang="en-US" sz="1150" dirty="0"/>
+          </a:p>
+        </p:txBody>
+      </p:sp>
+      <p:sp>
+        <p:nvSpPr>
+          <p:cNvPr id="8" name="Shape 6"/>
+          <p:cNvSpPr/>
+          <p:nvPr/>
+        </p:nvSpPr>
+        <p:spPr>
+          <a:xfrm>
+            <a:off x="4718304" y="1463040"/>
+            <a:ext cx="2155850" cy="384048"/>
+          </a:xfrm>
+          <a:prstGeom prst="roundRect">
+            <a:avLst>
+              <a:gd name="adj" fmla="val 19048"/>
+            </a:avLst>
+          </a:prstGeom>
+          <a:solidFill>
+            <a:srgbClr val="4A5A7A"/>
+          </a:solidFill>
+          <a:ln/>
+        </p:spPr>
+      </p:sp>
+      <p:sp>
+        <p:nvSpPr>
+          <p:cNvPr id="9" name="Text 7"/>
+          <p:cNvSpPr/>
+          <p:nvPr/>
+        </p:nvSpPr>
+        <p:spPr>
+          <a:xfrm>
+            <a:off x="4718304" y="1463040"/>
+            <a:ext cx="2155850" cy="384048"/>
+          </a:xfrm>
+          <a:prstGeom prst="rect">
+            <a:avLst/>
+          </a:prstGeom>
+          <a:noFill/>
+          <a:ln/>
+        </p:spPr>
+        <p:txBody>
+          <a:bodyPr wrap="square" lIns="0" tIns="0" rIns="0" bIns="0" rtlCol="0" anchor="ctr"/>
+          <a:lstStyle/>
+          <a:p>
+            <a:pPr algn="ctr" indent="0" marL="0">
+              <a:buNone/>
+            </a:pPr>
+            <a:r>
+              <a:rPr lang="en-US" sz="1150" b="1" dirty="0">
+                <a:solidFill>
+                  <a:srgbClr val="FFFFFF"/>
+                </a:solidFill>
+                <a:latin typeface="Yu Gothic" pitchFamily="34" charset="0"/>
+                <a:ea typeface="Yu Gothic" pitchFamily="34" charset="-122"/>
+                <a:cs typeface="Yu Gothic" pitchFamily="34" charset="-120"/>
+              </a:rPr>
+              <a:t>成果報酬 3％</a:t>
+            </a:r>
+            <a:endParaRPr lang="en-US" sz="1150" dirty="0"/>
+          </a:p>
+        </p:txBody>
+      </p:sp>
+      <p:sp>
+        <p:nvSpPr>
+          <p:cNvPr id="10" name="Shape 8"/>
+          <p:cNvSpPr/>
+          <p:nvPr/>
+        </p:nvSpPr>
+        <p:spPr>
+          <a:xfrm>
+            <a:off x="7093610" y="1463040"/>
+            <a:ext cx="2155850" cy="384048"/>
+          </a:xfrm>
+          <a:prstGeom prst="roundRect">
+            <a:avLst>
+              <a:gd name="adj" fmla="val 19048"/>
+            </a:avLst>
+          </a:prstGeom>
+          <a:solidFill>
+            <a:srgbClr val="4A5A7A"/>
+          </a:solidFill>
+          <a:ln/>
+        </p:spPr>
+      </p:sp>
+      <p:sp>
+        <p:nvSpPr>
+          <p:cNvPr id="11" name="Text 9"/>
+          <p:cNvSpPr/>
+          <p:nvPr/>
+        </p:nvSpPr>
+        <p:spPr>
+          <a:xfrm>
+            <a:off x="7093610" y="1463040"/>
+            <a:ext cx="2155850" cy="384048"/>
+          </a:xfrm>
+          <a:prstGeom prst="rect">
+            <a:avLst/>
+          </a:prstGeom>
+          <a:noFill/>
+          <a:ln/>
+        </p:spPr>
+        <p:txBody>
+          <a:bodyPr wrap="square" lIns="0" tIns="0" rIns="0" bIns="0" rtlCol="0" anchor="ctr"/>
+          <a:lstStyle/>
+          <a:p>
+            <a:pPr algn="ctr" indent="0" marL="0">
+              <a:buNone/>
+            </a:pPr>
+            <a:r>
+              <a:rPr lang="en-US" sz="1150" b="1" dirty="0">
+                <a:solidFill>
+                  <a:srgbClr val="FFFFFF"/>
+                </a:solidFill>
+                <a:latin typeface="Yu Gothic" pitchFamily="34" charset="0"/>
+                <a:ea typeface="Yu Gothic" pitchFamily="34" charset="-122"/>
+                <a:cs typeface="Yu Gothic" pitchFamily="34" charset="-120"/>
+              </a:rPr>
+              <a:t>成果報酬 4％</a:t>
+            </a:r>
+            <a:endParaRPr lang="en-US" sz="1150" dirty="0"/>
+          </a:p>
+        </p:txBody>
+      </p:sp>
+      <p:sp>
+        <p:nvSpPr>
+          <p:cNvPr id="12" name="Shape 10"/>
+          <p:cNvSpPr/>
+          <p:nvPr/>
+        </p:nvSpPr>
+        <p:spPr>
+          <a:xfrm>
+            <a:off x="9468917" y="1463040"/>
+            <a:ext cx="2155850" cy="384048"/>
+          </a:xfrm>
+          <a:prstGeom prst="roundRect">
+            <a:avLst>
+              <a:gd name="adj" fmla="val 19048"/>
+            </a:avLst>
+          </a:prstGeom>
+          <a:solidFill>
+            <a:srgbClr val="E9A63C"/>
+          </a:solidFill>
+          <a:ln/>
+        </p:spPr>
+      </p:sp>
+      <p:sp>
+        <p:nvSpPr>
+          <p:cNvPr id="13" name="Text 11"/>
+          <p:cNvSpPr/>
+          <p:nvPr/>
+        </p:nvSpPr>
+        <p:spPr>
+          <a:xfrm>
+            <a:off x="9468917" y="1463040"/>
+            <a:ext cx="2155850" cy="384048"/>
+          </a:xfrm>
+          <a:prstGeom prst="rect">
+            <a:avLst/>
+          </a:prstGeom>
+          <a:noFill/>
+          <a:ln/>
+        </p:spPr>
+        <p:txBody>
+          <a:bodyPr wrap="square" lIns="0" tIns="0" rIns="0" bIns="0" rtlCol="0" anchor="ctr"/>
+          <a:lstStyle/>
+          <a:p>
+            <a:pPr algn="ctr" indent="0" marL="0">
+              <a:buNone/>
+            </a:pPr>
+            <a:r>
+              <a:rPr lang="en-US" sz="1150" b="1" dirty="0">
+                <a:solidFill>
+                  <a:srgbClr val="FFFFFF"/>
+                </a:solidFill>
+                <a:latin typeface="Yu Gothic" pitchFamily="34" charset="0"/>
+                <a:ea typeface="Yu Gothic" pitchFamily="34" charset="-122"/>
+                <a:cs typeface="Yu Gothic" pitchFamily="34" charset="-120"/>
+              </a:rPr>
+              <a:t>成果報酬 5％</a:t>
+            </a:r>
+            <a:endParaRPr lang="en-US" sz="1150" dirty="0"/>
+          </a:p>
+        </p:txBody>
+      </p:sp>
+      <p:sp>
+        <p:nvSpPr>
+          <p:cNvPr id="14" name="Shape 12"/>
+          <p:cNvSpPr/>
+          <p:nvPr/>
+        </p:nvSpPr>
+        <p:spPr>
+          <a:xfrm>
+            <a:off x="566928" y="1956816"/>
+            <a:ext cx="3931920" cy="786384"/>
+          </a:xfrm>
+          <a:prstGeom prst="roundRect">
+            <a:avLst>
+              <a:gd name="adj" fmla="val 9302"/>
+            </a:avLst>
+          </a:prstGeom>
+          <a:solidFill>
+            <a:srgbClr val="F3F6FB"/>
+          </a:solidFill>
+          <a:ln w="12700">
+            <a:solidFill>
+              <a:srgbClr val="E3E9F4"/>
+            </a:solidFill>
+            <a:prstDash val="solid"/>
+          </a:ln>
+        </p:spPr>
+      </p:sp>
+      <p:sp>
+        <p:nvSpPr>
+          <p:cNvPr id="15" name="Text 13"/>
+          <p:cNvSpPr/>
+          <p:nvPr/>
+        </p:nvSpPr>
+        <p:spPr>
+          <a:xfrm>
+            <a:off x="804672" y="2048256"/>
+            <a:ext cx="3456432" cy="310896"/>
+          </a:xfrm>
+          <a:prstGeom prst="rect">
+            <a:avLst/>
+          </a:prstGeom>
+          <a:noFill/>
+          <a:ln/>
+        </p:spPr>
+        <p:txBody>
+          <a:bodyPr wrap="square" lIns="0" tIns="0" rIns="0" bIns="0" rtlCol="0" anchor="ctr"/>
+          <a:lstStyle/>
+          <a:p>
+            <a:pPr indent="0" marL="0">
+              <a:buNone/>
+            </a:pPr>
+            <a:r>
+              <a:rPr lang="en-US" sz="1400" b="1" dirty="0">
+                <a:solidFill>
+                  <a:srgbClr val="13224A"/>
+                </a:solidFill>
+                <a:latin typeface="Yu Gothic" pitchFamily="34" charset="0"/>
+                <a:ea typeface="Yu Gothic" pitchFamily="34" charset="-122"/>
+                <a:cs typeface="Yu Gothic" pitchFamily="34" charset="-120"/>
+              </a:rPr>
+              <a:t>再生・改修工事</a:t>
+            </a:r>
+            <a:endParaRPr lang="en-US" sz="1400" dirty="0"/>
+          </a:p>
+        </p:txBody>
+      </p:sp>
+      <p:sp>
+        <p:nvSpPr>
+          <p:cNvPr id="16" name="Text 14"/>
+          <p:cNvSpPr/>
+          <p:nvPr/>
+        </p:nvSpPr>
+        <p:spPr>
+          <a:xfrm>
+            <a:off x="804672" y="2377440"/>
+            <a:ext cx="3456432" cy="274320"/>
+          </a:xfrm>
+          <a:prstGeom prst="rect">
+            <a:avLst/>
+          </a:prstGeom>
+          <a:noFill/>
+          <a:ln/>
+        </p:spPr>
+        <p:txBody>
+          <a:bodyPr wrap="square" lIns="0" tIns="0" rIns="0" bIns="0" rtlCol="0" anchor="ctr"/>
+          <a:lstStyle/>
+          <a:p>
+            <a:pPr indent="0" marL="0">
+              <a:buNone/>
+            </a:pPr>
+            <a:r>
+              <a:rPr lang="en-US" sz="1150" dirty="0">
+                <a:solidFill>
+                  <a:srgbClr val="667089"/>
+                </a:solidFill>
+                <a:latin typeface="Yu Gothic" pitchFamily="34" charset="0"/>
+                <a:ea typeface="Yu Gothic" pitchFamily="34" charset="-122"/>
+                <a:cs typeface="Yu Gothic" pitchFamily="34" charset="-120"/>
+              </a:rPr>
+              <a:t>工事金額 500万円</a:t>
+            </a:r>
+            <a:endParaRPr lang="en-US" sz="1150" dirty="0"/>
+          </a:p>
+        </p:txBody>
+      </p:sp>
+      <p:sp>
+        <p:nvSpPr>
+          <p:cNvPr id="17" name="Shape 15"/>
+          <p:cNvSpPr/>
+          <p:nvPr/>
+        </p:nvSpPr>
+        <p:spPr>
+          <a:xfrm>
+            <a:off x="4718304" y="1956816"/>
+            <a:ext cx="2155850" cy="786384"/>
+          </a:xfrm>
+          <a:prstGeom prst="roundRect">
+            <a:avLst>
+              <a:gd name="adj" fmla="val 9302"/>
+            </a:avLst>
+          </a:prstGeom>
+          <a:solidFill>
+            <a:srgbClr val="FFFFFF"/>
+          </a:solidFill>
+          <a:ln w="12700">
+            <a:solidFill>
+              <a:srgbClr val="E3E9F4"/>
+            </a:solidFill>
+            <a:prstDash val="solid"/>
+          </a:ln>
+        </p:spPr>
+      </p:sp>
+      <p:sp>
+        <p:nvSpPr>
+          <p:cNvPr id="18" name="Text 16"/>
+          <p:cNvSpPr/>
+          <p:nvPr/>
+        </p:nvSpPr>
+        <p:spPr>
+          <a:xfrm>
+            <a:off x="4718304" y="1956816"/>
+            <a:ext cx="2155850" cy="786384"/>
+          </a:xfrm>
+          <a:prstGeom prst="rect">
+            <a:avLst/>
+          </a:prstGeom>
+          <a:noFill/>
+          <a:ln/>
+        </p:spPr>
+        <p:txBody>
+          <a:bodyPr wrap="square" lIns="0" tIns="0" rIns="0" bIns="0" rtlCol="0" anchor="ctr"/>
+          <a:lstStyle/>
+          <a:p>
+            <a:pPr algn="ctr" indent="0" marL="0">
+              <a:buNone/>
+            </a:pPr>
+            <a:r>
+              <a:rPr lang="en-US" sz="2200" b="1" dirty="0">
+                <a:solidFill>
+                  <a:srgbClr val="4A5A7A"/>
+                </a:solidFill>
+                <a:latin typeface="Yu Gothic" pitchFamily="34" charset="0"/>
+                <a:ea typeface="Yu Gothic" pitchFamily="34" charset="-122"/>
+                <a:cs typeface="Yu Gothic" pitchFamily="34" charset="-120"/>
+              </a:rPr>
+              <a:t>15万円</a:t>
+            </a:r>
+            <a:endParaRPr lang="en-US" sz="2200" dirty="0"/>
+          </a:p>
+        </p:txBody>
+      </p:sp>
+      <p:sp>
+        <p:nvSpPr>
+          <p:cNvPr id="19" name="Shape 17"/>
+          <p:cNvSpPr/>
+          <p:nvPr/>
+        </p:nvSpPr>
+        <p:spPr>
+          <a:xfrm>
+            <a:off x="7093610" y="1956816"/>
+            <a:ext cx="2155850" cy="786384"/>
+          </a:xfrm>
+          <a:prstGeom prst="roundRect">
+            <a:avLst>
+              <a:gd name="adj" fmla="val 9302"/>
+            </a:avLst>
+          </a:prstGeom>
+          <a:solidFill>
+            <a:srgbClr val="FFFFFF"/>
+          </a:solidFill>
+          <a:ln w="12700">
+            <a:solidFill>
+              <a:srgbClr val="E3E9F4"/>
+            </a:solidFill>
+            <a:prstDash val="solid"/>
+          </a:ln>
+        </p:spPr>
+      </p:sp>
+      <p:sp>
+        <p:nvSpPr>
+          <p:cNvPr id="20" name="Text 18"/>
+          <p:cNvSpPr/>
+          <p:nvPr/>
+        </p:nvSpPr>
+        <p:spPr>
+          <a:xfrm>
+            <a:off x="7093610" y="1956816"/>
+            <a:ext cx="2155850" cy="786384"/>
+          </a:xfrm>
+          <a:prstGeom prst="rect">
+            <a:avLst/>
+          </a:prstGeom>
+          <a:noFill/>
+          <a:ln/>
+        </p:spPr>
+        <p:txBody>
+          <a:bodyPr wrap="square" lIns="0" tIns="0" rIns="0" bIns="0" rtlCol="0" anchor="ctr"/>
+          <a:lstStyle/>
+          <a:p>
+            <a:pPr algn="ctr" indent="0" marL="0">
+              <a:buNone/>
+            </a:pPr>
+            <a:r>
+              <a:rPr lang="en-US" sz="2200" b="1" dirty="0">
+                <a:solidFill>
+                  <a:srgbClr val="4A5A7A"/>
+                </a:solidFill>
+                <a:latin typeface="Yu Gothic" pitchFamily="34" charset="0"/>
+                <a:ea typeface="Yu Gothic" pitchFamily="34" charset="-122"/>
+                <a:cs typeface="Yu Gothic" pitchFamily="34" charset="-120"/>
+              </a:rPr>
+              <a:t>20万円</a:t>
+            </a:r>
+            <a:endParaRPr lang="en-US" sz="2200" dirty="0"/>
+          </a:p>
+        </p:txBody>
+      </p:sp>
+      <p:sp>
+        <p:nvSpPr>
+          <p:cNvPr id="21" name="Shape 19"/>
+          <p:cNvSpPr/>
+          <p:nvPr/>
+        </p:nvSpPr>
+        <p:spPr>
+          <a:xfrm>
+            <a:off x="9468917" y="1956816"/>
+            <a:ext cx="2155850" cy="786384"/>
+          </a:xfrm>
+          <a:prstGeom prst="roundRect">
+            <a:avLst>
+              <a:gd name="adj" fmla="val 9302"/>
+            </a:avLst>
+          </a:prstGeom>
+          <a:solidFill>
+            <a:srgbClr val="FFFFFF"/>
+          </a:solidFill>
+          <a:ln w="12700">
+            <a:solidFill>
+              <a:srgbClr val="E3E9F4"/>
+            </a:solidFill>
+            <a:prstDash val="solid"/>
+          </a:ln>
+        </p:spPr>
+      </p:sp>
+      <p:sp>
+        <p:nvSpPr>
+          <p:cNvPr id="22" name="Text 20"/>
+          <p:cNvSpPr/>
+          <p:nvPr/>
+        </p:nvSpPr>
+        <p:spPr>
+          <a:xfrm>
+            <a:off x="9468917" y="1956816"/>
+            <a:ext cx="2155850" cy="786384"/>
+          </a:xfrm>
+          <a:prstGeom prst="rect">
+            <a:avLst/>
+          </a:prstGeom>
+          <a:noFill/>
+          <a:ln/>
+        </p:spPr>
+        <p:txBody>
+          <a:bodyPr wrap="square" lIns="0" tIns="0" rIns="0" bIns="0" rtlCol="0" anchor="ctr"/>
+          <a:lstStyle/>
+          <a:p>
+            <a:pPr algn="ctr" indent="0" marL="0">
+              <a:buNone/>
+            </a:pPr>
+            <a:r>
+              <a:rPr lang="en-US" sz="2200" b="1" dirty="0">
+                <a:solidFill>
+                  <a:srgbClr val="4A5A7A"/>
+                </a:solidFill>
+                <a:latin typeface="Yu Gothic" pitchFamily="34" charset="0"/>
+                <a:ea typeface="Yu Gothic" pitchFamily="34" charset="-122"/>
+                <a:cs typeface="Yu Gothic" pitchFamily="34" charset="-120"/>
+              </a:rPr>
+              <a:t>25万円</a:t>
+            </a:r>
+            <a:endParaRPr lang="en-US" sz="2200" dirty="0"/>
+          </a:p>
+        </p:txBody>
+      </p:sp>
+      <p:sp>
+        <p:nvSpPr>
+          <p:cNvPr id="23" name="Shape 21"/>
+          <p:cNvSpPr/>
+          <p:nvPr/>
+        </p:nvSpPr>
+        <p:spPr>
+          <a:xfrm>
+            <a:off x="566928" y="2852928"/>
+            <a:ext cx="3931920" cy="786384"/>
+          </a:xfrm>
+          <a:prstGeom prst="roundRect">
+            <a:avLst>
+              <a:gd name="adj" fmla="val 9302"/>
+            </a:avLst>
+          </a:prstGeom>
+          <a:solidFill>
+            <a:srgbClr val="FCF3E3"/>
+          </a:solidFill>
+          <a:ln w="12700">
+            <a:solidFill>
+              <a:srgbClr val="E3E9F4"/>
+            </a:solidFill>
+            <a:prstDash val="solid"/>
+          </a:ln>
+        </p:spPr>
+      </p:sp>
+      <p:sp>
+        <p:nvSpPr>
+          <p:cNvPr id="24" name="Text 22"/>
+          <p:cNvSpPr/>
+          <p:nvPr/>
+        </p:nvSpPr>
+        <p:spPr>
+          <a:xfrm>
+            <a:off x="804672" y="2944368"/>
+            <a:ext cx="3456432" cy="310896"/>
+          </a:xfrm>
+          <a:prstGeom prst="rect">
+            <a:avLst/>
+          </a:prstGeom>
+          <a:noFill/>
+          <a:ln/>
+        </p:spPr>
+        <p:txBody>
+          <a:bodyPr wrap="square" lIns="0" tIns="0" rIns="0" bIns="0" rtlCol="0" anchor="ctr"/>
+          <a:lstStyle/>
+          <a:p>
+            <a:pPr indent="0" marL="0">
+              <a:buNone/>
+            </a:pPr>
+            <a:r>
+              <a:rPr lang="en-US" sz="1400" b="1" dirty="0">
+                <a:solidFill>
+                  <a:srgbClr val="13224A"/>
+                </a:solidFill>
+                <a:latin typeface="Yu Gothic" pitchFamily="34" charset="0"/>
+                <a:ea typeface="Yu Gothic" pitchFamily="34" charset="-122"/>
+                <a:cs typeface="Yu Gothic" pitchFamily="34" charset="-120"/>
+              </a:rPr>
+              <a:t>解体・建て替え新築</a:t>
+            </a:r>
+            <a:endParaRPr lang="en-US" sz="1400" dirty="0"/>
+          </a:p>
+        </p:txBody>
+      </p:sp>
+      <p:sp>
+        <p:nvSpPr>
+          <p:cNvPr id="25" name="Text 23"/>
+          <p:cNvSpPr/>
+          <p:nvPr/>
+        </p:nvSpPr>
+        <p:spPr>
+          <a:xfrm>
+            <a:off x="804672" y="3273552"/>
+            <a:ext cx="3456432" cy="274320"/>
+          </a:xfrm>
+          <a:prstGeom prst="rect">
+            <a:avLst/>
+          </a:prstGeom>
+          <a:noFill/>
+          <a:ln/>
+        </p:spPr>
+        <p:txBody>
+          <a:bodyPr wrap="square" lIns="0" tIns="0" rIns="0" bIns="0" rtlCol="0" anchor="ctr"/>
+          <a:lstStyle/>
+          <a:p>
+            <a:pPr indent="0" marL="0">
+              <a:buNone/>
+            </a:pPr>
+            <a:r>
+              <a:rPr lang="en-US" sz="1150" dirty="0">
+                <a:solidFill>
+                  <a:srgbClr val="667089"/>
+                </a:solidFill>
+                <a:latin typeface="Yu Gothic" pitchFamily="34" charset="0"/>
+                <a:ea typeface="Yu Gothic" pitchFamily="34" charset="-122"/>
+                <a:cs typeface="Yu Gothic" pitchFamily="34" charset="-120"/>
+              </a:rPr>
+              <a:t>建物価格 2,500万円</a:t>
+            </a:r>
+            <a:endParaRPr lang="en-US" sz="1150" dirty="0"/>
+          </a:p>
+        </p:txBody>
+      </p:sp>
+      <p:sp>
+        <p:nvSpPr>
+          <p:cNvPr id="26" name="Shape 24"/>
+          <p:cNvSpPr/>
+          <p:nvPr/>
+        </p:nvSpPr>
+        <p:spPr>
+          <a:xfrm>
+            <a:off x="4718304" y="2852928"/>
+            <a:ext cx="2155850" cy="786384"/>
+          </a:xfrm>
+          <a:prstGeom prst="roundRect">
+            <a:avLst>
+              <a:gd name="adj" fmla="val 9302"/>
+            </a:avLst>
+          </a:prstGeom>
+          <a:solidFill>
+            <a:srgbClr val="FFFFFF"/>
+          </a:solidFill>
+          <a:ln w="12700">
+            <a:solidFill>
+              <a:srgbClr val="E3E9F4"/>
+            </a:solidFill>
+            <a:prstDash val="solid"/>
+          </a:ln>
+        </p:spPr>
+      </p:sp>
+      <p:sp>
+        <p:nvSpPr>
+          <p:cNvPr id="27" name="Text 25"/>
+          <p:cNvSpPr/>
+          <p:nvPr/>
+        </p:nvSpPr>
+        <p:spPr>
+          <a:xfrm>
+            <a:off x="4718304" y="2852928"/>
+            <a:ext cx="2155850" cy="786384"/>
+          </a:xfrm>
+          <a:prstGeom prst="rect">
+            <a:avLst/>
+          </a:prstGeom>
+          <a:noFill/>
+          <a:ln/>
+        </p:spPr>
+        <p:txBody>
+          <a:bodyPr wrap="square" lIns="0" tIns="0" rIns="0" bIns="0" rtlCol="0" anchor="ctr"/>
+          <a:lstStyle/>
+          <a:p>
+            <a:pPr algn="ctr" indent="0" marL="0">
+              <a:buNone/>
+            </a:pPr>
+            <a:r>
+              <a:rPr lang="en-US" sz="2600" b="1" dirty="0">
+                <a:solidFill>
+                  <a:srgbClr val="13224A"/>
+                </a:solidFill>
+                <a:latin typeface="Yu Gothic" pitchFamily="34" charset="0"/>
+                <a:ea typeface="Yu Gothic" pitchFamily="34" charset="-122"/>
+                <a:cs typeface="Yu Gothic" pitchFamily="34" charset="-120"/>
+              </a:rPr>
+              <a:t>75万円</a:t>
+            </a:r>
+            <a:endParaRPr lang="en-US" sz="2600" dirty="0"/>
+          </a:p>
+        </p:txBody>
+      </p:sp>
+      <p:sp>
+        <p:nvSpPr>
+          <p:cNvPr id="28" name="Shape 26"/>
+          <p:cNvSpPr/>
+          <p:nvPr/>
+        </p:nvSpPr>
+        <p:spPr>
+          <a:xfrm>
+            <a:off x="7093610" y="2852928"/>
+            <a:ext cx="2155850" cy="786384"/>
+          </a:xfrm>
+          <a:prstGeom prst="roundRect">
+            <a:avLst>
+              <a:gd name="adj" fmla="val 9302"/>
+            </a:avLst>
+          </a:prstGeom>
+          <a:solidFill>
+            <a:srgbClr val="FFFFFF"/>
+          </a:solidFill>
+          <a:ln w="12700">
+            <a:solidFill>
+              <a:srgbClr val="E3E9F4"/>
+            </a:solidFill>
+            <a:prstDash val="solid"/>
+          </a:ln>
+        </p:spPr>
+      </p:sp>
+      <p:sp>
+        <p:nvSpPr>
+          <p:cNvPr id="29" name="Text 27"/>
+          <p:cNvSpPr/>
+          <p:nvPr/>
+        </p:nvSpPr>
+        <p:spPr>
+          <a:xfrm>
+            <a:off x="7093610" y="2852928"/>
+            <a:ext cx="2155850" cy="786384"/>
+          </a:xfrm>
+          <a:prstGeom prst="rect">
+            <a:avLst/>
+          </a:prstGeom>
+          <a:noFill/>
+          <a:ln/>
+        </p:spPr>
+        <p:txBody>
+          <a:bodyPr wrap="square" lIns="0" tIns="0" rIns="0" bIns="0" rtlCol="0" anchor="ctr"/>
+          <a:lstStyle/>
+          <a:p>
+            <a:pPr algn="ctr" indent="0" marL="0">
+              <a:buNone/>
+            </a:pPr>
+            <a:r>
+              <a:rPr lang="en-US" sz="2600" b="1" dirty="0">
+                <a:solidFill>
+                  <a:srgbClr val="13224A"/>
+                </a:solidFill>
+                <a:latin typeface="Yu Gothic" pitchFamily="34" charset="0"/>
+                <a:ea typeface="Yu Gothic" pitchFamily="34" charset="-122"/>
+                <a:cs typeface="Yu Gothic" pitchFamily="34" charset="-120"/>
+              </a:rPr>
+              <a:t>100万円</a:t>
+            </a:r>
+            <a:endParaRPr lang="en-US" sz="2600" dirty="0"/>
+          </a:p>
+        </p:txBody>
+      </p:sp>
+      <p:sp>
+        <p:nvSpPr>
+          <p:cNvPr id="30" name="Shape 28"/>
+          <p:cNvSpPr/>
+          <p:nvPr/>
+        </p:nvSpPr>
+        <p:spPr>
+          <a:xfrm>
+            <a:off x="9468917" y="2852928"/>
+            <a:ext cx="2155850" cy="786384"/>
+          </a:xfrm>
+          <a:prstGeom prst="roundRect">
+            <a:avLst>
+              <a:gd name="adj" fmla="val 9302"/>
+            </a:avLst>
+          </a:prstGeom>
+          <a:solidFill>
+            <a:srgbClr val="FCF3E3"/>
+          </a:solidFill>
+          <a:ln w="12700">
+            <a:solidFill>
+              <a:srgbClr val="E3E9F4"/>
+            </a:solidFill>
+            <a:prstDash val="solid"/>
+          </a:ln>
+        </p:spPr>
+      </p:sp>
+      <p:sp>
+        <p:nvSpPr>
+          <p:cNvPr id="31" name="Text 29"/>
+          <p:cNvSpPr/>
+          <p:nvPr/>
+        </p:nvSpPr>
+        <p:spPr>
+          <a:xfrm>
+            <a:off x="9468917" y="2852928"/>
+            <a:ext cx="2155850" cy="786384"/>
+          </a:xfrm>
+          <a:prstGeom prst="rect">
+            <a:avLst/>
+          </a:prstGeom>
+          <a:noFill/>
+          <a:ln/>
+        </p:spPr>
+        <p:txBody>
+          <a:bodyPr wrap="square" lIns="0" tIns="0" rIns="0" bIns="0" rtlCol="0" anchor="ctr"/>
+          <a:lstStyle/>
+          <a:p>
+            <a:pPr algn="ctr" indent="0" marL="0">
+              <a:buNone/>
+            </a:pPr>
+            <a:r>
+              <a:rPr lang="en-US" sz="2600" b="1" dirty="0">
+                <a:solidFill>
+                  <a:srgbClr val="13224A"/>
+                </a:solidFill>
+                <a:latin typeface="Yu Gothic" pitchFamily="34" charset="0"/>
+                <a:ea typeface="Yu Gothic" pitchFamily="34" charset="-122"/>
+                <a:cs typeface="Yu Gothic" pitchFamily="34" charset="-120"/>
+              </a:rPr>
+              <a:t>125万円</a:t>
+            </a:r>
+            <a:endParaRPr lang="en-US" sz="2600" dirty="0"/>
+          </a:p>
+        </p:txBody>
+      </p:sp>
+      <p:sp>
+        <p:nvSpPr>
+          <p:cNvPr id="32" name="Shape 30"/>
+          <p:cNvSpPr/>
+          <p:nvPr/>
+        </p:nvSpPr>
+        <p:spPr>
+          <a:xfrm>
+            <a:off x="566928" y="3803904"/>
+            <a:ext cx="11057839" cy="1060704"/>
+          </a:xfrm>
+          <a:prstGeom prst="roundRect">
+            <a:avLst>
+              <a:gd name="adj" fmla="val 6897"/>
+            </a:avLst>
+          </a:prstGeom>
+          <a:solidFill>
+            <a:srgbClr val="F3F6FB"/>
+          </a:solidFill>
+          <a:ln w="12700">
+            <a:solidFill>
+              <a:srgbClr val="E3E9F4"/>
+            </a:solidFill>
+            <a:prstDash val="solid"/>
+          </a:ln>
+        </p:spPr>
+      </p:sp>
+      <p:sp>
+        <p:nvSpPr>
+          <p:cNvPr id="33" name="Text 31"/>
+          <p:cNvSpPr/>
+          <p:nvPr/>
+        </p:nvSpPr>
+        <p:spPr>
+          <a:xfrm>
+            <a:off x="950976" y="3968496"/>
+            <a:ext cx="10289743" cy="365760"/>
+          </a:xfrm>
+          <a:prstGeom prst="rect">
+            <a:avLst/>
+          </a:prstGeom>
+          <a:noFill/>
+          <a:ln/>
+        </p:spPr>
+        <p:txBody>
+          <a:bodyPr wrap="square" lIns="0" tIns="0" rIns="0" bIns="0" rtlCol="0" anchor="ctr"/>
+          <a:lstStyle/>
+          <a:p>
+            <a:pPr indent="0" marL="0">
+              <a:buNone/>
+            </a:pPr>
+            <a:r>
+              <a:rPr lang="en-US" sz="1450" dirty="0">
+                <a:solidFill>
+                  <a:srgbClr val="1B2437"/>
+                </a:solidFill>
+                <a:latin typeface="Yu Gothic" pitchFamily="34" charset="0"/>
+                <a:ea typeface="Yu Gothic" pitchFamily="34" charset="-122"/>
+                <a:cs typeface="Yu Gothic" pitchFamily="34" charset="-120"/>
+              </a:rPr>
+              <a:t>現行プランの初年度固定費 435万円　＝　</a:t>
+            </a:r>
+            <a:pPr indent="0" marL="0">
+              <a:buNone/>
+            </a:pPr>
+            <a:r>
+              <a:rPr lang="en-US" sz="1650" b="1" dirty="0">
+                <a:solidFill>
+                  <a:srgbClr val="13224A"/>
+                </a:solidFill>
+                <a:latin typeface="Yu Gothic" pitchFamily="34" charset="0"/>
+                <a:ea typeface="Yu Gothic" pitchFamily="34" charset="-122"/>
+                <a:cs typeface="Yu Gothic" pitchFamily="34" charset="-120"/>
+              </a:rPr>
+              <a:t>成果報酬5％なら新築4件</a:t>
+            </a:r>
+            <a:pPr indent="0" marL="0">
+              <a:buNone/>
+            </a:pPr>
+            <a:r>
+              <a:rPr lang="en-US" sz="1450" dirty="0">
+                <a:solidFill>
+                  <a:srgbClr val="1B2437"/>
+                </a:solidFill>
+                <a:latin typeface="Yu Gothic" pitchFamily="34" charset="0"/>
+                <a:ea typeface="Yu Gothic" pitchFamily="34" charset="-122"/>
+                <a:cs typeface="Yu Gothic" pitchFamily="34" charset="-120"/>
+              </a:rPr>
+              <a:t>　／　3％なら6件程度の成約に相当</a:t>
+            </a:r>
+            <a:endParaRPr lang="en-US" sz="1450" dirty="0"/>
+          </a:p>
+        </p:txBody>
+      </p:sp>
+      <p:sp>
+        <p:nvSpPr>
+          <p:cNvPr id="34" name="Text 32"/>
+          <p:cNvSpPr/>
+          <p:nvPr/>
+        </p:nvSpPr>
+        <p:spPr>
+          <a:xfrm>
+            <a:off x="950976" y="4370832"/>
+            <a:ext cx="10289743" cy="365760"/>
+          </a:xfrm>
+          <a:prstGeom prst="rect">
+            <a:avLst/>
+          </a:prstGeom>
+          <a:noFill/>
+          <a:ln/>
+        </p:spPr>
+        <p:txBody>
+          <a:bodyPr wrap="square" lIns="0" tIns="0" rIns="0" bIns="0" rtlCol="0" anchor="ctr"/>
+          <a:lstStyle/>
+          <a:p>
+            <a:pPr indent="0" marL="0">
+              <a:buNone/>
+            </a:pPr>
+            <a:r>
+              <a:rPr lang="en-US" sz="1150" dirty="0">
+                <a:solidFill>
+                  <a:srgbClr val="667089"/>
+                </a:solidFill>
+                <a:latin typeface="Yu Gothic" pitchFamily="34" charset="0"/>
+                <a:ea typeface="Yu Gothic" pitchFamily="34" charset="-122"/>
+                <a:cs typeface="Yu Gothic" pitchFamily="34" charset="-120"/>
+              </a:rPr>
+              <a:t>空き家はすべてが再生に向くわけではない。状態・立地・オーナーの希望によっては、解体して新築へ建て替える可能性がある。</a:t>
+            </a:r>
+            <a:endParaRPr lang="en-US" sz="1150" dirty="0"/>
+          </a:p>
+        </p:txBody>
+      </p:sp>
+      <p:sp>
+        <p:nvSpPr>
+          <p:cNvPr id="35" name="Shape 33"/>
+          <p:cNvSpPr/>
+          <p:nvPr/>
+        </p:nvSpPr>
+        <p:spPr>
+          <a:xfrm>
+            <a:off x="566928" y="5010912"/>
+            <a:ext cx="11057839" cy="1060704"/>
+          </a:xfrm>
+          <a:prstGeom prst="roundRect">
+            <a:avLst>
+              <a:gd name="adj" fmla="val 6897"/>
             </a:avLst>
           </a:prstGeom>
           <a:solidFill>
@@ -2544,69 +3527,33 @@
       </p:sp>
       <p:sp>
         <p:nvSpPr>
-          <p:cNvPr id="7" name="Text 5"/>
-          <p:cNvSpPr/>
-          <p:nvPr/>
-        </p:nvSpPr>
-        <p:spPr>
-          <a:xfrm>
-            <a:off x="841248" y="1700784"/>
-            <a:ext cx="2651760" cy="274320"/>
-          </a:xfrm>
-          <a:prstGeom prst="rect">
-            <a:avLst/>
-          </a:prstGeom>
-          <a:noFill/>
-          <a:ln/>
-        </p:spPr>
-        <p:txBody>
-          <a:bodyPr wrap="square" lIns="0" tIns="0" rIns="0" bIns="0" rtlCol="0" anchor="ctr"/>
-          <a:lstStyle/>
-          <a:p>
-            <a:pPr indent="0" marL="0">
-              <a:buNone/>
-            </a:pPr>
-            <a:r>
-              <a:rPr lang="en-US" sz="1100" dirty="0">
-                <a:solidFill>
-                  <a:srgbClr val="DCE6F7"/>
-                </a:solidFill>
-                <a:latin typeface="Yu Gothic" pitchFamily="34" charset="0"/>
-                <a:ea typeface="Yu Gothic" pitchFamily="34" charset="-122"/>
-                <a:cs typeface="Yu Gothic" pitchFamily="34" charset="-120"/>
-              </a:rPr>
-              <a:t>前提｜新築建物価格の仮定</a:t>
-            </a:r>
-            <a:endParaRPr lang="en-US" sz="1100" dirty="0"/>
-          </a:p>
-        </p:txBody>
-      </p:sp>
-      <p:sp>
-        <p:nvSpPr>
-          <p:cNvPr id="8" name="Text 6"/>
-          <p:cNvSpPr/>
-          <p:nvPr/>
-        </p:nvSpPr>
-        <p:spPr>
-          <a:xfrm>
-            <a:off x="841248" y="2011680"/>
-            <a:ext cx="2651760" cy="548640"/>
-          </a:xfrm>
-          <a:prstGeom prst="rect">
-            <a:avLst/>
-          </a:prstGeom>
-          <a:noFill/>
-          <a:ln/>
-        </p:spPr>
-        <p:txBody>
-          <a:bodyPr wrap="square" lIns="0" tIns="0" rIns="0" bIns="0" rtlCol="0" anchor="ctr"/>
-          <a:lstStyle/>
-          <a:p>
-            <a:pPr indent="0" marL="0">
-              <a:buNone/>
-            </a:pPr>
-            <a:r>
-              <a:rPr lang="en-US" sz="2800" b="1" dirty="0">
+          <p:cNvPr id="36" name="Text 34"/>
+          <p:cNvSpPr/>
+          <p:nvPr/>
+        </p:nvSpPr>
+        <p:spPr>
+          <a:xfrm>
+            <a:off x="950976" y="5138928"/>
+            <a:ext cx="10289743" cy="822960"/>
+          </a:xfrm>
+          <a:prstGeom prst="rect">
+            <a:avLst/>
+          </a:prstGeom>
+          <a:noFill/>
+          <a:ln/>
+        </p:spPr>
+        <p:txBody>
+          <a:bodyPr wrap="square" lIns="0" tIns="0" rIns="0" bIns="0" rtlCol="0" anchor="ctr"/>
+          <a:lstStyle/>
+          <a:p>
+            <a:pPr indent="0" marL="0">
+              <a:lnSpc>
+                <a:spcPts val="2000"/>
+              </a:lnSpc>
+              <a:buNone/>
+            </a:pPr>
+            <a:r>
+              <a:rPr lang="en-US" sz="1250" dirty="0">
                 <a:solidFill>
                   <a:srgbClr val="FFFFFF"/>
                 </a:solidFill>
@@ -2614,447 +3561,38 @@
                 <a:ea typeface="Yu Gothic" pitchFamily="34" charset="-122"/>
                 <a:cs typeface="Yu Gothic" pitchFamily="34" charset="-120"/>
               </a:rPr>
-              <a:t>2,500万円</a:t>
-            </a:r>
-            <a:endParaRPr lang="en-US" sz="2800" dirty="0"/>
-          </a:p>
-        </p:txBody>
-      </p:sp>
-      <p:sp>
-        <p:nvSpPr>
-          <p:cNvPr id="9" name="Shape 7"/>
-          <p:cNvSpPr/>
-          <p:nvPr/>
-        </p:nvSpPr>
-        <p:spPr>
-          <a:xfrm>
-            <a:off x="4078224" y="1517904"/>
-            <a:ext cx="2344826" cy="1371600"/>
-          </a:xfrm>
-          <a:prstGeom prst="roundRect">
-            <a:avLst>
-              <a:gd name="adj" fmla="val 5333"/>
-            </a:avLst>
-          </a:prstGeom>
-          <a:solidFill>
-            <a:srgbClr val="F3F6FB"/>
-          </a:solidFill>
-          <a:ln w="12700">
-            <a:solidFill>
-              <a:srgbClr val="E3E9F4"/>
-            </a:solidFill>
-            <a:prstDash val="solid"/>
-          </a:ln>
-        </p:spPr>
-      </p:sp>
-      <p:sp>
-        <p:nvSpPr>
-          <p:cNvPr id="10" name="Text 8"/>
-          <p:cNvSpPr/>
-          <p:nvPr/>
-        </p:nvSpPr>
-        <p:spPr>
-          <a:xfrm>
-            <a:off x="4078224" y="1682496"/>
-            <a:ext cx="2344826" cy="310896"/>
-          </a:xfrm>
-          <a:prstGeom prst="rect">
-            <a:avLst/>
-          </a:prstGeom>
-          <a:noFill/>
-          <a:ln/>
-        </p:spPr>
-        <p:txBody>
-          <a:bodyPr wrap="square" lIns="0" tIns="0" rIns="0" bIns="0" rtlCol="0" anchor="ctr"/>
-          <a:lstStyle/>
-          <a:p>
-            <a:pPr algn="ctr" indent="0" marL="0">
-              <a:buNone/>
-            </a:pPr>
-            <a:r>
-              <a:rPr lang="en-US" sz="1400" b="1" dirty="0">
-                <a:solidFill>
-                  <a:srgbClr val="E9A63C"/>
-                </a:solidFill>
-                <a:latin typeface="Yu Gothic" pitchFamily="34" charset="0"/>
-                <a:ea typeface="Yu Gothic" pitchFamily="34" charset="-122"/>
-                <a:cs typeface="Yu Gothic" pitchFamily="34" charset="-120"/>
-              </a:rPr>
-              <a:t>3％</a:t>
-            </a:r>
-            <a:endParaRPr lang="en-US" sz="1400" dirty="0"/>
-          </a:p>
-        </p:txBody>
-      </p:sp>
-      <p:sp>
-        <p:nvSpPr>
-          <p:cNvPr id="11" name="Text 9"/>
-          <p:cNvSpPr/>
-          <p:nvPr/>
-        </p:nvSpPr>
-        <p:spPr>
-          <a:xfrm>
-            <a:off x="4078224" y="2048256"/>
-            <a:ext cx="2344826" cy="548640"/>
-          </a:xfrm>
-          <a:prstGeom prst="rect">
-            <a:avLst/>
-          </a:prstGeom>
-          <a:noFill/>
-          <a:ln/>
-        </p:spPr>
-        <p:txBody>
-          <a:bodyPr wrap="square" lIns="0" tIns="0" rIns="0" bIns="0" rtlCol="0" anchor="ctr"/>
-          <a:lstStyle/>
-          <a:p>
-            <a:pPr algn="ctr" indent="0" marL="0">
-              <a:buNone/>
-            </a:pPr>
-            <a:r>
-              <a:rPr lang="en-US" sz="2600" b="1" dirty="0">
-                <a:solidFill>
-                  <a:srgbClr val="13224A"/>
-                </a:solidFill>
-                <a:latin typeface="Yu Gothic" pitchFamily="34" charset="0"/>
-                <a:ea typeface="Yu Gothic" pitchFamily="34" charset="-122"/>
-                <a:cs typeface="Yu Gothic" pitchFamily="34" charset="-120"/>
-              </a:rPr>
-              <a:t>75万円</a:t>
-            </a:r>
-            <a:endParaRPr lang="en-US" sz="2600" dirty="0"/>
-          </a:p>
-        </p:txBody>
-      </p:sp>
-      <p:sp>
-        <p:nvSpPr>
-          <p:cNvPr id="12" name="Shape 10"/>
-          <p:cNvSpPr/>
-          <p:nvPr/>
-        </p:nvSpPr>
-        <p:spPr>
-          <a:xfrm>
-            <a:off x="6679082" y="1517904"/>
-            <a:ext cx="2344826" cy="1371600"/>
-          </a:xfrm>
-          <a:prstGeom prst="roundRect">
-            <a:avLst>
-              <a:gd name="adj" fmla="val 5333"/>
-            </a:avLst>
-          </a:prstGeom>
-          <a:solidFill>
-            <a:srgbClr val="F3F6FB"/>
-          </a:solidFill>
-          <a:ln w="12700">
-            <a:solidFill>
-              <a:srgbClr val="E3E9F4"/>
-            </a:solidFill>
-            <a:prstDash val="solid"/>
-          </a:ln>
-        </p:spPr>
-      </p:sp>
-      <p:sp>
-        <p:nvSpPr>
-          <p:cNvPr id="13" name="Text 11"/>
-          <p:cNvSpPr/>
-          <p:nvPr/>
-        </p:nvSpPr>
-        <p:spPr>
-          <a:xfrm>
-            <a:off x="6679082" y="1682496"/>
-            <a:ext cx="2344826" cy="310896"/>
-          </a:xfrm>
-          <a:prstGeom prst="rect">
-            <a:avLst/>
-          </a:prstGeom>
-          <a:noFill/>
-          <a:ln/>
-        </p:spPr>
-        <p:txBody>
-          <a:bodyPr wrap="square" lIns="0" tIns="0" rIns="0" bIns="0" rtlCol="0" anchor="ctr"/>
-          <a:lstStyle/>
-          <a:p>
-            <a:pPr algn="ctr" indent="0" marL="0">
-              <a:buNone/>
-            </a:pPr>
-            <a:r>
-              <a:rPr lang="en-US" sz="1400" b="1" dirty="0">
-                <a:solidFill>
-                  <a:srgbClr val="E9A63C"/>
-                </a:solidFill>
-                <a:latin typeface="Yu Gothic" pitchFamily="34" charset="0"/>
-                <a:ea typeface="Yu Gothic" pitchFamily="34" charset="-122"/>
-                <a:cs typeface="Yu Gothic" pitchFamily="34" charset="-120"/>
-              </a:rPr>
-              <a:t>4％</a:t>
-            </a:r>
-            <a:endParaRPr lang="en-US" sz="1400" dirty="0"/>
-          </a:p>
-        </p:txBody>
-      </p:sp>
-      <p:sp>
-        <p:nvSpPr>
-          <p:cNvPr id="14" name="Text 12"/>
-          <p:cNvSpPr/>
-          <p:nvPr/>
-        </p:nvSpPr>
-        <p:spPr>
-          <a:xfrm>
-            <a:off x="6679082" y="2048256"/>
-            <a:ext cx="2344826" cy="548640"/>
-          </a:xfrm>
-          <a:prstGeom prst="rect">
-            <a:avLst/>
-          </a:prstGeom>
-          <a:noFill/>
-          <a:ln/>
-        </p:spPr>
-        <p:txBody>
-          <a:bodyPr wrap="square" lIns="0" tIns="0" rIns="0" bIns="0" rtlCol="0" anchor="ctr"/>
-          <a:lstStyle/>
-          <a:p>
-            <a:pPr algn="ctr" indent="0" marL="0">
-              <a:buNone/>
-            </a:pPr>
-            <a:r>
-              <a:rPr lang="en-US" sz="2600" b="1" dirty="0">
-                <a:solidFill>
-                  <a:srgbClr val="13224A"/>
-                </a:solidFill>
-                <a:latin typeface="Yu Gothic" pitchFamily="34" charset="0"/>
-                <a:ea typeface="Yu Gothic" pitchFamily="34" charset="-122"/>
-                <a:cs typeface="Yu Gothic" pitchFamily="34" charset="-120"/>
-              </a:rPr>
-              <a:t>100万円</a:t>
-            </a:r>
-            <a:endParaRPr lang="en-US" sz="2600" dirty="0"/>
-          </a:p>
-        </p:txBody>
-      </p:sp>
-      <p:sp>
-        <p:nvSpPr>
-          <p:cNvPr id="15" name="Shape 13"/>
-          <p:cNvSpPr/>
-          <p:nvPr/>
-        </p:nvSpPr>
-        <p:spPr>
-          <a:xfrm>
-            <a:off x="9279941" y="1517904"/>
-            <a:ext cx="2344826" cy="1371600"/>
-          </a:xfrm>
-          <a:prstGeom prst="roundRect">
-            <a:avLst>
-              <a:gd name="adj" fmla="val 5333"/>
-            </a:avLst>
-          </a:prstGeom>
-          <a:solidFill>
-            <a:srgbClr val="FCF3E3"/>
-          </a:solidFill>
-          <a:ln w="12700">
-            <a:solidFill>
-              <a:srgbClr val="E3E9F4"/>
-            </a:solidFill>
-            <a:prstDash val="solid"/>
-          </a:ln>
-        </p:spPr>
-      </p:sp>
-      <p:sp>
-        <p:nvSpPr>
-          <p:cNvPr id="16" name="Text 14"/>
-          <p:cNvSpPr/>
-          <p:nvPr/>
-        </p:nvSpPr>
-        <p:spPr>
-          <a:xfrm>
-            <a:off x="9279941" y="1682496"/>
-            <a:ext cx="2344826" cy="310896"/>
-          </a:xfrm>
-          <a:prstGeom prst="rect">
-            <a:avLst/>
-          </a:prstGeom>
-          <a:noFill/>
-          <a:ln/>
-        </p:spPr>
-        <p:txBody>
-          <a:bodyPr wrap="square" lIns="0" tIns="0" rIns="0" bIns="0" rtlCol="0" anchor="ctr"/>
-          <a:lstStyle/>
-          <a:p>
-            <a:pPr algn="ctr" indent="0" marL="0">
-              <a:buNone/>
-            </a:pPr>
-            <a:r>
-              <a:rPr lang="en-US" sz="1400" b="1" dirty="0">
-                <a:solidFill>
-                  <a:srgbClr val="E9A63C"/>
-                </a:solidFill>
-                <a:latin typeface="Yu Gothic" pitchFamily="34" charset="0"/>
-                <a:ea typeface="Yu Gothic" pitchFamily="34" charset="-122"/>
-                <a:cs typeface="Yu Gothic" pitchFamily="34" charset="-120"/>
-              </a:rPr>
-              <a:t>5％</a:t>
-            </a:r>
-            <a:endParaRPr lang="en-US" sz="1400" dirty="0"/>
-          </a:p>
-        </p:txBody>
-      </p:sp>
-      <p:sp>
-        <p:nvSpPr>
-          <p:cNvPr id="17" name="Text 15"/>
-          <p:cNvSpPr/>
-          <p:nvPr/>
-        </p:nvSpPr>
-        <p:spPr>
-          <a:xfrm>
-            <a:off x="9279941" y="2048256"/>
-            <a:ext cx="2344826" cy="548640"/>
-          </a:xfrm>
-          <a:prstGeom prst="rect">
-            <a:avLst/>
-          </a:prstGeom>
-          <a:noFill/>
-          <a:ln/>
-        </p:spPr>
-        <p:txBody>
-          <a:bodyPr wrap="square" lIns="0" tIns="0" rIns="0" bIns="0" rtlCol="0" anchor="ctr"/>
-          <a:lstStyle/>
-          <a:p>
-            <a:pPr algn="ctr" indent="0" marL="0">
-              <a:buNone/>
-            </a:pPr>
-            <a:r>
-              <a:rPr lang="en-US" sz="2600" b="1" dirty="0">
-                <a:solidFill>
-                  <a:srgbClr val="13224A"/>
-                </a:solidFill>
-                <a:latin typeface="Yu Gothic" pitchFamily="34" charset="0"/>
-                <a:ea typeface="Yu Gothic" pitchFamily="34" charset="-122"/>
-                <a:cs typeface="Yu Gothic" pitchFamily="34" charset="-120"/>
-              </a:rPr>
-              <a:t>125万円</a:t>
-            </a:r>
-            <a:endParaRPr lang="en-US" sz="2600" dirty="0"/>
-          </a:p>
-        </p:txBody>
-      </p:sp>
-      <p:sp>
-        <p:nvSpPr>
-          <p:cNvPr id="18" name="Shape 16"/>
-          <p:cNvSpPr/>
-          <p:nvPr/>
-        </p:nvSpPr>
-        <p:spPr>
-          <a:xfrm>
-            <a:off x="566928" y="3127248"/>
-            <a:ext cx="11057839" cy="1280160"/>
-          </a:xfrm>
-          <a:prstGeom prst="roundRect">
-            <a:avLst>
-              <a:gd name="adj" fmla="val 5714"/>
-            </a:avLst>
-          </a:prstGeom>
-          <a:solidFill>
-            <a:srgbClr val="F3F6FB"/>
-          </a:solidFill>
-          <a:ln w="12700">
-            <a:solidFill>
-              <a:srgbClr val="E3E9F4"/>
-            </a:solidFill>
-            <a:prstDash val="solid"/>
-          </a:ln>
-        </p:spPr>
-      </p:sp>
-      <p:sp>
-        <p:nvSpPr>
-          <p:cNvPr id="19" name="Text 17"/>
-          <p:cNvSpPr/>
-          <p:nvPr/>
-        </p:nvSpPr>
-        <p:spPr>
-          <a:xfrm>
-            <a:off x="950976" y="3346704"/>
-            <a:ext cx="10289743" cy="402336"/>
-          </a:xfrm>
-          <a:prstGeom prst="rect">
-            <a:avLst/>
-          </a:prstGeom>
-          <a:noFill/>
-          <a:ln/>
-        </p:spPr>
-        <p:txBody>
-          <a:bodyPr wrap="square" lIns="0" tIns="0" rIns="0" bIns="0" rtlCol="0" anchor="ctr"/>
-          <a:lstStyle/>
-          <a:p>
-            <a:pPr indent="0" marL="0">
-              <a:buNone/>
-            </a:pPr>
-            <a:r>
-              <a:rPr lang="en-US" sz="1500" dirty="0">
-                <a:solidFill>
-                  <a:srgbClr val="1B2437"/>
-                </a:solidFill>
-                <a:latin typeface="Yu Gothic" pitchFamily="34" charset="0"/>
-                <a:ea typeface="Yu Gothic" pitchFamily="34" charset="-122"/>
-                <a:cs typeface="Yu Gothic" pitchFamily="34" charset="-120"/>
-              </a:rPr>
-              <a:t>現行プランの初年度固定費 435万円　＝　</a:t>
-            </a:r>
-            <a:pPr indent="0" marL="0">
-              <a:buNone/>
-            </a:pPr>
-            <a:r>
-              <a:rPr lang="en-US" sz="1700" b="1" dirty="0">
-                <a:solidFill>
-                  <a:srgbClr val="13224A"/>
-                </a:solidFill>
-                <a:latin typeface="Yu Gothic" pitchFamily="34" charset="0"/>
-                <a:ea typeface="Yu Gothic" pitchFamily="34" charset="-122"/>
-                <a:cs typeface="Yu Gothic" pitchFamily="34" charset="-120"/>
-              </a:rPr>
-              <a:t>成果報酬5％なら新築4件</a:t>
-            </a:r>
-            <a:pPr indent="0" marL="0">
-              <a:buNone/>
-            </a:pPr>
-            <a:r>
-              <a:rPr lang="en-US" sz="1500" dirty="0">
-                <a:solidFill>
-                  <a:srgbClr val="1B2437"/>
-                </a:solidFill>
-                <a:latin typeface="Yu Gothic" pitchFamily="34" charset="0"/>
-                <a:ea typeface="Yu Gothic" pitchFamily="34" charset="-122"/>
-                <a:cs typeface="Yu Gothic" pitchFamily="34" charset="-120"/>
-              </a:rPr>
-              <a:t>　／　3％なら6件程度の成約に相当</a:t>
-            </a:r>
-            <a:endParaRPr lang="en-US" sz="1500" dirty="0"/>
-          </a:p>
-        </p:txBody>
-      </p:sp>
-      <p:sp>
-        <p:nvSpPr>
-          <p:cNvPr id="20" name="Text 18"/>
-          <p:cNvSpPr/>
-          <p:nvPr/>
-        </p:nvSpPr>
-        <p:spPr>
-          <a:xfrm>
-            <a:off x="950976" y="3803904"/>
-            <a:ext cx="10289743" cy="384048"/>
-          </a:xfrm>
-          <a:prstGeom prst="rect">
-            <a:avLst/>
-          </a:prstGeom>
-          <a:noFill/>
-          <a:ln/>
-        </p:spPr>
-        <p:txBody>
-          <a:bodyPr wrap="square" lIns="0" tIns="0" rIns="0" bIns="0" rtlCol="0" anchor="ctr"/>
-          <a:lstStyle/>
-          <a:p>
-            <a:pPr indent="0" marL="0">
-              <a:buNone/>
-            </a:pPr>
-            <a:r>
-              <a:rPr lang="en-US" sz="1150" dirty="0">
+              <a:t>収益機会は新築だけではない。小修繕（数十万円）→ 再生・改修（数百万円）→ 解体 → 建て替え新築（2,500万円規模）まで、管理から生まれる工事すべてが階段状に成果報酬の対象になる。</a:t>
+            </a:r>
+            <a:endParaRPr lang="en-US" sz="1250" dirty="0"/>
+          </a:p>
+        </p:txBody>
+      </p:sp>
+      <p:sp>
+        <p:nvSpPr>
+          <p:cNvPr id="37" name="Text 35"/>
+          <p:cNvSpPr/>
+          <p:nvPr/>
+        </p:nvSpPr>
+        <p:spPr>
+          <a:xfrm>
+            <a:off x="566928" y="6144768"/>
+            <a:ext cx="11057839" cy="274320"/>
+          </a:xfrm>
+          <a:prstGeom prst="rect">
+            <a:avLst/>
+          </a:prstGeom>
+          <a:noFill/>
+          <a:ln/>
+        </p:spPr>
+        <p:txBody>
+          <a:bodyPr wrap="square" lIns="0" tIns="0" rIns="0" bIns="0" rtlCol="0" anchor="ctr"/>
+          <a:lstStyle/>
+          <a:p>
+            <a:pPr indent="0" marL="0">
+              <a:buNone/>
+            </a:pPr>
+            <a:r>
+              <a:rPr lang="en-US" sz="950" dirty="0">
                 <a:solidFill>
                   <a:srgbClr val="667089"/>
                 </a:solidFill>
@@ -3062,115 +3600,7 @@
                 <a:ea typeface="Yu Gothic" pitchFamily="34" charset="-122"/>
                 <a:cs typeface="Yu Gothic" pitchFamily="34" charset="-120"/>
               </a:rPr>
-              <a:t>空き家はすべてが再生に向くわけではない。状態・立地・オーナーの希望によっては、解体して新築へ建て替える可能性がある。</a:t>
-            </a:r>
-            <a:endParaRPr lang="en-US" sz="1150" dirty="0"/>
-          </a:p>
-        </p:txBody>
-      </p:sp>
-      <p:sp>
-        <p:nvSpPr>
-          <p:cNvPr id="21" name="Shape 19"/>
-          <p:cNvSpPr/>
-          <p:nvPr/>
-        </p:nvSpPr>
-        <p:spPr>
-          <a:xfrm>
-            <a:off x="566928" y="4572000"/>
-            <a:ext cx="11057839" cy="1133856"/>
-          </a:xfrm>
-          <a:prstGeom prst="roundRect">
-            <a:avLst>
-              <a:gd name="adj" fmla="val 6452"/>
-            </a:avLst>
-          </a:prstGeom>
-          <a:solidFill>
-            <a:srgbClr val="13224A"/>
-          </a:solidFill>
-          <a:ln w="12700">
-            <a:solidFill>
-              <a:srgbClr val="E3E9F4"/>
-            </a:solidFill>
-            <a:prstDash val="solid"/>
-          </a:ln>
-        </p:spPr>
-      </p:sp>
-      <p:sp>
-        <p:nvSpPr>
-          <p:cNvPr id="22" name="Text 20"/>
-          <p:cNvSpPr/>
-          <p:nvPr/>
-        </p:nvSpPr>
-        <p:spPr>
-          <a:xfrm>
-            <a:off x="950976" y="4828032"/>
-            <a:ext cx="10289743" cy="640080"/>
-          </a:xfrm>
-          <a:prstGeom prst="rect">
-            <a:avLst/>
-          </a:prstGeom>
-          <a:noFill/>
-          <a:ln/>
-        </p:spPr>
-        <p:txBody>
-          <a:bodyPr wrap="square" lIns="0" tIns="0" rIns="0" bIns="0" rtlCol="0" anchor="ctr"/>
-          <a:lstStyle/>
-          <a:p>
-            <a:pPr indent="0" marL="0">
-              <a:lnSpc>
-                <a:spcPts val="2100"/>
-              </a:lnSpc>
-              <a:buNone/>
-            </a:pPr>
-            <a:r>
-              <a:rPr lang="en-US" sz="1300" dirty="0">
-                <a:solidFill>
-                  <a:srgbClr val="FFFFFF"/>
-                </a:solidFill>
-                <a:latin typeface="Yu Gothic" pitchFamily="34" charset="0"/>
-                <a:ea typeface="Yu Gothic" pitchFamily="34" charset="-122"/>
-                <a:cs typeface="Yu Gothic" pitchFamily="34" charset="-120"/>
-              </a:rPr>
-              <a:t>収益機会は新築だけではない。小修繕（数十万円）→ 再生・改修（数百万円）→ 解体 → 建て替え新築（2,500万円規模）まで、階段状に生まれる。</a:t>
-            </a:r>
-            <a:endParaRPr lang="en-US" sz="1300" dirty="0"/>
-          </a:p>
-        </p:txBody>
-      </p:sp>
-      <p:sp>
-        <p:nvSpPr>
-          <p:cNvPr id="23" name="Text 21"/>
-          <p:cNvSpPr/>
-          <p:nvPr/>
-        </p:nvSpPr>
-        <p:spPr>
-          <a:xfrm>
-            <a:off x="566928" y="5870448"/>
-            <a:ext cx="11057839" cy="274320"/>
-          </a:xfrm>
-          <a:prstGeom prst="rect">
-            <a:avLst/>
-          </a:prstGeom>
-          <a:noFill/>
-          <a:ln/>
-        </p:spPr>
-        <p:txBody>
-          <a:bodyPr wrap="square" lIns="0" tIns="0" rIns="0" bIns="0" rtlCol="0" anchor="ctr"/>
-          <a:lstStyle/>
-          <a:p>
-            <a:pPr indent="0" marL="0">
-              <a:buNone/>
-            </a:pPr>
-            <a:r>
-              <a:rPr lang="en-US" sz="950" dirty="0">
-                <a:solidFill>
-                  <a:srgbClr val="667089"/>
-                </a:solidFill>
-                <a:latin typeface="Yu Gothic" pitchFamily="34" charset="0"/>
-                <a:ea typeface="Yu Gothic" pitchFamily="34" charset="-122"/>
-                <a:cs typeface="Yu Gothic" pitchFamily="34" charset="-120"/>
-              </a:rPr>
-              <a:t>計算：2,500万円 × 3〜5％。建物価格2,500万円は本企画の［仮定］。</a:t>
+              <a:t>計算：工事金額 × 3〜5％。再生工事500万円、新築の建物価格2,500万円はいずれも本企画の［仮定］。</a:t>
             </a:r>
             <a:endParaRPr lang="en-US" sz="950" dirty="0"/>
           </a:p>
